--- a/AgenticAI/5-Tools-and-Framework/Langchain-1-why-do-we-need-it.pptx
+++ b/AgenticAI/5-Tools-and-Framework/Langchain-1-why-do-we-need-it.pptx
@@ -219,7 +219,7 @@
           <a:p>
             <a:fld id="{7BAEECA8-D063-486F-AE31-5020270C1449}" type="datetimeFigureOut">
               <a:rPr lang="en-US" smtClean="0"/>
-              <a:t>5/2/2026</a:t>
+              <a:t>6/1/2026</a:t>
             </a:fld>
             <a:endParaRPr lang="en-US"/>
           </a:p>
@@ -396,7 +396,7 @@
           <a:p>
             <a:fld id="{CB233BD1-3BA8-448D-9D08-7846095EA517}" type="datetimeFigureOut">
               <a:rPr lang="en-US" smtClean="0"/>
-              <a:t>5/2/2026</a:t>
+              <a:t>6/1/2026</a:t>
             </a:fld>
             <a:endParaRPr lang="en-US"/>
           </a:p>
@@ -810,7 +810,7 @@
           <a:p>
             <a:fld id="{6383FAE1-13DE-4511-8C1B-C8AFB720664C}" type="datetimeFigureOut">
               <a:rPr lang="en-US" smtClean="0"/>
-              <a:t>5/2/2026</a:t>
+              <a:t>6/1/2026</a:t>
             </a:fld>
             <a:endParaRPr lang="en-US"/>
           </a:p>
@@ -1008,7 +1008,7 @@
           <a:p>
             <a:fld id="{6383FAE1-13DE-4511-8C1B-C8AFB720664C}" type="datetimeFigureOut">
               <a:rPr lang="en-US" smtClean="0"/>
-              <a:t>5/2/2026</a:t>
+              <a:t>6/1/2026</a:t>
             </a:fld>
             <a:endParaRPr lang="en-US"/>
           </a:p>
@@ -1216,7 +1216,7 @@
           <a:p>
             <a:fld id="{6383FAE1-13DE-4511-8C1B-C8AFB720664C}" type="datetimeFigureOut">
               <a:rPr lang="en-US" smtClean="0"/>
-              <a:t>5/2/2026</a:t>
+              <a:t>6/1/2026</a:t>
             </a:fld>
             <a:endParaRPr lang="en-US"/>
           </a:p>
@@ -1414,7 +1414,7 @@
           <a:p>
             <a:fld id="{6383FAE1-13DE-4511-8C1B-C8AFB720664C}" type="datetimeFigureOut">
               <a:rPr lang="en-US" smtClean="0"/>
-              <a:t>5/2/2026</a:t>
+              <a:t>6/1/2026</a:t>
             </a:fld>
             <a:endParaRPr lang="en-US"/>
           </a:p>
@@ -1689,7 +1689,7 @@
           <a:p>
             <a:fld id="{6383FAE1-13DE-4511-8C1B-C8AFB720664C}" type="datetimeFigureOut">
               <a:rPr lang="en-US" smtClean="0"/>
-              <a:t>5/2/2026</a:t>
+              <a:t>6/1/2026</a:t>
             </a:fld>
             <a:endParaRPr lang="en-US"/>
           </a:p>
@@ -1954,7 +1954,7 @@
           <a:p>
             <a:fld id="{6383FAE1-13DE-4511-8C1B-C8AFB720664C}" type="datetimeFigureOut">
               <a:rPr lang="en-US" smtClean="0"/>
-              <a:t>5/2/2026</a:t>
+              <a:t>6/1/2026</a:t>
             </a:fld>
             <a:endParaRPr lang="en-US"/>
           </a:p>
@@ -2366,7 +2366,7 @@
           <a:p>
             <a:fld id="{6383FAE1-13DE-4511-8C1B-C8AFB720664C}" type="datetimeFigureOut">
               <a:rPr lang="en-US" smtClean="0"/>
-              <a:t>5/2/2026</a:t>
+              <a:t>6/1/2026</a:t>
             </a:fld>
             <a:endParaRPr lang="en-US"/>
           </a:p>
@@ -2507,7 +2507,7 @@
           <a:p>
             <a:fld id="{6383FAE1-13DE-4511-8C1B-C8AFB720664C}" type="datetimeFigureOut">
               <a:rPr lang="en-US" smtClean="0"/>
-              <a:t>5/2/2026</a:t>
+              <a:t>6/1/2026</a:t>
             </a:fld>
             <a:endParaRPr lang="en-US"/>
           </a:p>
@@ -2620,7 +2620,7 @@
           <a:p>
             <a:fld id="{6383FAE1-13DE-4511-8C1B-C8AFB720664C}" type="datetimeFigureOut">
               <a:rPr lang="en-US" smtClean="0"/>
-              <a:t>5/2/2026</a:t>
+              <a:t>6/1/2026</a:t>
             </a:fld>
             <a:endParaRPr lang="en-US"/>
           </a:p>
@@ -2931,7 +2931,7 @@
           <a:p>
             <a:fld id="{6383FAE1-13DE-4511-8C1B-C8AFB720664C}" type="datetimeFigureOut">
               <a:rPr lang="en-US" smtClean="0"/>
-              <a:t>5/2/2026</a:t>
+              <a:t>6/1/2026</a:t>
             </a:fld>
             <a:endParaRPr lang="en-US"/>
           </a:p>
@@ -3222,7 +3222,7 @@
           <a:p>
             <a:fld id="{6383FAE1-13DE-4511-8C1B-C8AFB720664C}" type="datetimeFigureOut">
               <a:rPr lang="en-US" smtClean="0"/>
-              <a:t>5/2/2026</a:t>
+              <a:t>6/1/2026</a:t>
             </a:fld>
             <a:endParaRPr lang="en-US"/>
           </a:p>
@@ -3466,7 +3466,7 @@
           <a:p>
             <a:fld id="{6383FAE1-13DE-4511-8C1B-C8AFB720664C}" type="datetimeFigureOut">
               <a:rPr lang="en-US" smtClean="0"/>
-              <a:t>5/2/2026</a:t>
+              <a:t>6/1/2026</a:t>
             </a:fld>
             <a:endParaRPr lang="en-US"/>
           </a:p>
@@ -4040,7 +4040,7 @@
         <p:spPr>
           <a:xfrm>
             <a:off x="477520" y="1003776"/>
-            <a:ext cx="10292080" cy="461665"/>
+            <a:ext cx="10292080" cy="523220"/>
           </a:xfrm>
           <a:prstGeom prst="rect">
             <a:avLst/>
@@ -4057,7 +4057,7 @@
               <a:buNone/>
             </a:pPr>
             <a:r>
-              <a:rPr lang="en-US" sz="2400" dirty="0">
+              <a:rPr lang="en-US" sz="2800" dirty="0">
                 <a:solidFill>
                   <a:schemeClr val="accent6">
                     <a:lumMod val="60000"/>
@@ -4068,7 +4068,7 @@
               <a:t>The need for </a:t>
             </a:r>
             <a:r>
-              <a:rPr lang="en-US" sz="2400" dirty="0" err="1">
+              <a:rPr lang="en-US" sz="2800" dirty="0" err="1">
                 <a:solidFill>
                   <a:schemeClr val="accent6">
                     <a:lumMod val="60000"/>
@@ -4078,7 +4078,7 @@
               </a:rPr>
               <a:t>langchain</a:t>
             </a:r>
-            <a:endParaRPr lang="en-US" sz="2400" dirty="0">
+            <a:endParaRPr lang="en-US" sz="2800" dirty="0">
               <a:solidFill>
                 <a:schemeClr val="accent6">
                   <a:lumMod val="60000"/>
@@ -4189,7 +4189,7 @@
         </p:blipFill>
         <p:spPr>
           <a:xfrm>
-            <a:off x="293291" y="661688"/>
+            <a:off x="210994" y="760786"/>
             <a:ext cx="5949580" cy="3398248"/>
           </a:xfrm>
           <a:prstGeom prst="rect">
@@ -4219,7 +4219,7 @@
         </p:blipFill>
         <p:spPr>
           <a:xfrm>
-            <a:off x="6405094" y="1773936"/>
+            <a:off x="6405094" y="2203704"/>
             <a:ext cx="5575912" cy="3910660"/>
           </a:xfrm>
           <a:prstGeom prst="rect">
@@ -4300,7 +4300,7 @@
                   </a:schemeClr>
                 </a:solidFill>
               </a:rPr>
-              <a:t>Langchain  helps in  providing uniformity</a:t>
+              <a:t>Langchain  helps in providing uniformity</a:t>
             </a:r>
           </a:p>
         </p:txBody>
@@ -4504,10 +4504,9 @@
           <a:p>
             <a:pPr algn="ctr"/>
             <a:r>
-              <a:rPr lang="en-US" sz="3200" dirty="0" err="1"/>
+              <a:rPr lang="en-US" sz="3200" dirty="0"/>
               <a:t>LangChain</a:t>
             </a:r>
-            <a:endParaRPr lang="en-US" sz="3200" dirty="0"/>
           </a:p>
         </p:txBody>
       </p:sp>
